--- a/Proyecto1/Proyecto1.pptx
+++ b/Proyecto1/Proyecto1.pptx
@@ -17,30 +17,31 @@
     <p:sldId id="265" r:id="rId11"/>
     <p:sldId id="266" r:id="rId12"/>
     <p:sldId id="267" r:id="rId13"/>
-    <p:sldId id="268" r:id="rId14"/>
+    <p:sldId id="269" r:id="rId14"/>
+    <p:sldId id="268" r:id="rId15"/>
   </p:sldIdLst>
   <p:sldSz cx="18288000" cy="10287000"/>
   <p:notesSz cx="6858000" cy="9144000"/>
   <p:embeddedFontLst>
     <p:embeddedFont>
       <p:font typeface="Bukhari Script" panose="020B0604020202020204" charset="0"/>
-      <p:regular r:id="rId15"/>
+      <p:regular r:id="rId16"/>
     </p:embeddedFont>
     <p:embeddedFont>
       <p:font typeface="ITC Avant Garde Gothic" panose="020B0604020202020204" charset="0"/>
-      <p:regular r:id="rId16"/>
+      <p:regular r:id="rId17"/>
     </p:embeddedFont>
     <p:embeddedFont>
       <p:font typeface="ITC Avant Garde Gothic Bold" panose="020B0604020202020204" charset="0"/>
-      <p:regular r:id="rId17"/>
+      <p:regular r:id="rId18"/>
     </p:embeddedFont>
     <p:embeddedFont>
       <p:font typeface="TT Fors" panose="020B0604020202020204" charset="0"/>
-      <p:regular r:id="rId18"/>
+      <p:regular r:id="rId19"/>
     </p:embeddedFont>
     <p:embeddedFont>
       <p:font typeface="TT Fors Bold" panose="020B0604020202020204" charset="0"/>
-      <p:regular r:id="rId19"/>
+      <p:regular r:id="rId20"/>
     </p:embeddedFont>
   </p:embeddedFontLst>
   <p:defaultTextStyle>
@@ -5994,16 +5995,280 @@
               </a:spcBef>
             </a:pPr>
             <a:r>
-              <a:rPr lang="en-US" sz="2551" spc="-76">
-                <a:solidFill>
-                  <a:srgbClr val="000000"/>
-                </a:solidFill>
-                <a:latin typeface="ITC Avant Garde Gothic"/>
-                <a:ea typeface="ITC Avant Garde Gothic"/>
-                <a:cs typeface="ITC Avant Garde Gothic"/>
-                <a:sym typeface="ITC Avant Garde Gothic"/>
-              </a:rPr>
-              <a:t>El proyecto logra integrar de manera efectiva los conceptos de programación, bases de datos y diseño de interfaces gráficas.</a:t>
+              <a:rPr lang="en-US" sz="2551" spc="-76" dirty="0">
+                <a:solidFill>
+                  <a:srgbClr val="000000"/>
+                </a:solidFill>
+                <a:latin typeface="ITC Avant Garde Gothic"/>
+                <a:ea typeface="ITC Avant Garde Gothic"/>
+                <a:cs typeface="ITC Avant Garde Gothic"/>
+                <a:sym typeface="ITC Avant Garde Gothic"/>
+              </a:rPr>
+              <a:t>El </a:t>
+            </a:r>
+            <a:r>
+              <a:rPr lang="en-US" sz="2551" spc="-76" dirty="0" err="1">
+                <a:solidFill>
+                  <a:srgbClr val="000000"/>
+                </a:solidFill>
+                <a:latin typeface="ITC Avant Garde Gothic"/>
+                <a:ea typeface="ITC Avant Garde Gothic"/>
+                <a:cs typeface="ITC Avant Garde Gothic"/>
+                <a:sym typeface="ITC Avant Garde Gothic"/>
+              </a:rPr>
+              <a:t>proyecto</a:t>
+            </a:r>
+            <a:r>
+              <a:rPr lang="en-US" sz="2551" spc="-76" dirty="0">
+                <a:solidFill>
+                  <a:srgbClr val="000000"/>
+                </a:solidFill>
+                <a:latin typeface="ITC Avant Garde Gothic"/>
+                <a:ea typeface="ITC Avant Garde Gothic"/>
+                <a:cs typeface="ITC Avant Garde Gothic"/>
+                <a:sym typeface="ITC Avant Garde Gothic"/>
+              </a:rPr>
+              <a:t> </a:t>
+            </a:r>
+            <a:r>
+              <a:rPr lang="en-US" sz="2551" spc="-76" dirty="0" err="1">
+                <a:solidFill>
+                  <a:srgbClr val="000000"/>
+                </a:solidFill>
+                <a:latin typeface="ITC Avant Garde Gothic"/>
+                <a:ea typeface="ITC Avant Garde Gothic"/>
+                <a:cs typeface="ITC Avant Garde Gothic"/>
+                <a:sym typeface="ITC Avant Garde Gothic"/>
+              </a:rPr>
+              <a:t>logra</a:t>
+            </a:r>
+            <a:r>
+              <a:rPr lang="en-US" sz="2551" spc="-76" dirty="0">
+                <a:solidFill>
+                  <a:srgbClr val="000000"/>
+                </a:solidFill>
+                <a:latin typeface="ITC Avant Garde Gothic"/>
+                <a:ea typeface="ITC Avant Garde Gothic"/>
+                <a:cs typeface="ITC Avant Garde Gothic"/>
+                <a:sym typeface="ITC Avant Garde Gothic"/>
+              </a:rPr>
+              <a:t> </a:t>
+            </a:r>
+            <a:r>
+              <a:rPr lang="en-US" sz="2551" spc="-76" dirty="0" err="1">
+                <a:solidFill>
+                  <a:srgbClr val="000000"/>
+                </a:solidFill>
+                <a:latin typeface="ITC Avant Garde Gothic"/>
+                <a:ea typeface="ITC Avant Garde Gothic"/>
+                <a:cs typeface="ITC Avant Garde Gothic"/>
+                <a:sym typeface="ITC Avant Garde Gothic"/>
+              </a:rPr>
+              <a:t>integrar</a:t>
+            </a:r>
+            <a:r>
+              <a:rPr lang="en-US" sz="2551" spc="-76" dirty="0">
+                <a:solidFill>
+                  <a:srgbClr val="000000"/>
+                </a:solidFill>
+                <a:latin typeface="ITC Avant Garde Gothic"/>
+                <a:ea typeface="ITC Avant Garde Gothic"/>
+                <a:cs typeface="ITC Avant Garde Gothic"/>
+                <a:sym typeface="ITC Avant Garde Gothic"/>
+              </a:rPr>
+              <a:t> de </a:t>
+            </a:r>
+            <a:r>
+              <a:rPr lang="en-US" sz="2551" spc="-76" dirty="0" err="1">
+                <a:solidFill>
+                  <a:srgbClr val="000000"/>
+                </a:solidFill>
+                <a:latin typeface="ITC Avant Garde Gothic"/>
+                <a:ea typeface="ITC Avant Garde Gothic"/>
+                <a:cs typeface="ITC Avant Garde Gothic"/>
+                <a:sym typeface="ITC Avant Garde Gothic"/>
+              </a:rPr>
+              <a:t>manera</a:t>
+            </a:r>
+            <a:r>
+              <a:rPr lang="en-US" sz="2551" spc="-76" dirty="0">
+                <a:solidFill>
+                  <a:srgbClr val="000000"/>
+                </a:solidFill>
+                <a:latin typeface="ITC Avant Garde Gothic"/>
+                <a:ea typeface="ITC Avant Garde Gothic"/>
+                <a:cs typeface="ITC Avant Garde Gothic"/>
+                <a:sym typeface="ITC Avant Garde Gothic"/>
+              </a:rPr>
+              <a:t> </a:t>
+            </a:r>
+            <a:r>
+              <a:rPr lang="en-US" sz="2551" spc="-76" dirty="0" err="1">
+                <a:solidFill>
+                  <a:srgbClr val="000000"/>
+                </a:solidFill>
+                <a:latin typeface="ITC Avant Garde Gothic"/>
+                <a:ea typeface="ITC Avant Garde Gothic"/>
+                <a:cs typeface="ITC Avant Garde Gothic"/>
+                <a:sym typeface="ITC Avant Garde Gothic"/>
+              </a:rPr>
+              <a:t>efectiva</a:t>
+            </a:r>
+            <a:r>
+              <a:rPr lang="en-US" sz="2551" spc="-76" dirty="0">
+                <a:solidFill>
+                  <a:srgbClr val="000000"/>
+                </a:solidFill>
+                <a:latin typeface="ITC Avant Garde Gothic"/>
+                <a:ea typeface="ITC Avant Garde Gothic"/>
+                <a:cs typeface="ITC Avant Garde Gothic"/>
+                <a:sym typeface="ITC Avant Garde Gothic"/>
+              </a:rPr>
+              <a:t> </a:t>
+            </a:r>
+            <a:r>
+              <a:rPr lang="en-US" sz="2551" spc="-76" dirty="0" err="1">
+                <a:solidFill>
+                  <a:srgbClr val="000000"/>
+                </a:solidFill>
+                <a:latin typeface="ITC Avant Garde Gothic"/>
+                <a:ea typeface="ITC Avant Garde Gothic"/>
+                <a:cs typeface="ITC Avant Garde Gothic"/>
+                <a:sym typeface="ITC Avant Garde Gothic"/>
+              </a:rPr>
+              <a:t>los</a:t>
+            </a:r>
+            <a:r>
+              <a:rPr lang="en-US" sz="2551" spc="-76" dirty="0">
+                <a:solidFill>
+                  <a:srgbClr val="000000"/>
+                </a:solidFill>
+                <a:latin typeface="ITC Avant Garde Gothic"/>
+                <a:ea typeface="ITC Avant Garde Gothic"/>
+                <a:cs typeface="ITC Avant Garde Gothic"/>
+                <a:sym typeface="ITC Avant Garde Gothic"/>
+              </a:rPr>
+              <a:t> </a:t>
+            </a:r>
+            <a:r>
+              <a:rPr lang="en-US" sz="2551" spc="-76" dirty="0" err="1">
+                <a:solidFill>
+                  <a:srgbClr val="000000"/>
+                </a:solidFill>
+                <a:latin typeface="ITC Avant Garde Gothic"/>
+                <a:ea typeface="ITC Avant Garde Gothic"/>
+                <a:cs typeface="ITC Avant Garde Gothic"/>
+                <a:sym typeface="ITC Avant Garde Gothic"/>
+              </a:rPr>
+              <a:t>conceptos</a:t>
+            </a:r>
+            <a:r>
+              <a:rPr lang="en-US" sz="2551" spc="-76" dirty="0">
+                <a:solidFill>
+                  <a:srgbClr val="000000"/>
+                </a:solidFill>
+                <a:latin typeface="ITC Avant Garde Gothic"/>
+                <a:ea typeface="ITC Avant Garde Gothic"/>
+                <a:cs typeface="ITC Avant Garde Gothic"/>
+                <a:sym typeface="ITC Avant Garde Gothic"/>
+              </a:rPr>
+              <a:t> de </a:t>
+            </a:r>
+            <a:r>
+              <a:rPr lang="en-US" sz="2551" spc="-76" dirty="0" err="1">
+                <a:solidFill>
+                  <a:srgbClr val="000000"/>
+                </a:solidFill>
+                <a:latin typeface="ITC Avant Garde Gothic"/>
+                <a:ea typeface="ITC Avant Garde Gothic"/>
+                <a:cs typeface="ITC Avant Garde Gothic"/>
+                <a:sym typeface="ITC Avant Garde Gothic"/>
+              </a:rPr>
+              <a:t>programación</a:t>
+            </a:r>
+            <a:r>
+              <a:rPr lang="en-US" sz="2551" spc="-76" dirty="0">
+                <a:solidFill>
+                  <a:srgbClr val="000000"/>
+                </a:solidFill>
+                <a:latin typeface="ITC Avant Garde Gothic"/>
+                <a:ea typeface="ITC Avant Garde Gothic"/>
+                <a:cs typeface="ITC Avant Garde Gothic"/>
+                <a:sym typeface="ITC Avant Garde Gothic"/>
+              </a:rPr>
+              <a:t>, bases de </a:t>
+            </a:r>
+            <a:r>
+              <a:rPr lang="en-US" sz="2551" spc="-76" dirty="0" err="1">
+                <a:solidFill>
+                  <a:srgbClr val="000000"/>
+                </a:solidFill>
+                <a:latin typeface="ITC Avant Garde Gothic"/>
+                <a:ea typeface="ITC Avant Garde Gothic"/>
+                <a:cs typeface="ITC Avant Garde Gothic"/>
+                <a:sym typeface="ITC Avant Garde Gothic"/>
+              </a:rPr>
+              <a:t>datos</a:t>
+            </a:r>
+            <a:r>
+              <a:rPr lang="en-US" sz="2551" spc="-76" dirty="0">
+                <a:solidFill>
+                  <a:srgbClr val="000000"/>
+                </a:solidFill>
+                <a:latin typeface="ITC Avant Garde Gothic"/>
+                <a:ea typeface="ITC Avant Garde Gothic"/>
+                <a:cs typeface="ITC Avant Garde Gothic"/>
+                <a:sym typeface="ITC Avant Garde Gothic"/>
+              </a:rPr>
+              <a:t> y </a:t>
+            </a:r>
+            <a:r>
+              <a:rPr lang="en-US" sz="2551" spc="-76" dirty="0" err="1">
+                <a:solidFill>
+                  <a:srgbClr val="000000"/>
+                </a:solidFill>
+                <a:latin typeface="ITC Avant Garde Gothic"/>
+                <a:ea typeface="ITC Avant Garde Gothic"/>
+                <a:cs typeface="ITC Avant Garde Gothic"/>
+                <a:sym typeface="ITC Avant Garde Gothic"/>
+              </a:rPr>
+              <a:t>diseño</a:t>
+            </a:r>
+            <a:r>
+              <a:rPr lang="en-US" sz="2551" spc="-76" dirty="0">
+                <a:solidFill>
+                  <a:srgbClr val="000000"/>
+                </a:solidFill>
+                <a:latin typeface="ITC Avant Garde Gothic"/>
+                <a:ea typeface="ITC Avant Garde Gothic"/>
+                <a:cs typeface="ITC Avant Garde Gothic"/>
+                <a:sym typeface="ITC Avant Garde Gothic"/>
+              </a:rPr>
+              <a:t> de interfaces </a:t>
+            </a:r>
+            <a:r>
+              <a:rPr lang="en-US" sz="2551" spc="-76" dirty="0" err="1">
+                <a:solidFill>
+                  <a:srgbClr val="000000"/>
+                </a:solidFill>
+                <a:latin typeface="ITC Avant Garde Gothic"/>
+                <a:ea typeface="ITC Avant Garde Gothic"/>
+                <a:cs typeface="ITC Avant Garde Gothic"/>
+                <a:sym typeface="ITC Avant Garde Gothic"/>
+              </a:rPr>
+              <a:t>gráficas</a:t>
+            </a:r>
+            <a:r>
+              <a:rPr lang="en-US" sz="2551" spc="-76" dirty="0">
+                <a:solidFill>
+                  <a:srgbClr val="000000"/>
+                </a:solidFill>
+                <a:latin typeface="ITC Avant Garde Gothic"/>
+                <a:ea typeface="ITC Avant Garde Gothic"/>
+                <a:cs typeface="ITC Avant Garde Gothic"/>
+                <a:sym typeface="ITC Avant Garde Gothic"/>
+              </a:rPr>
+              <a:t>.</a:t>
             </a:r>
           </a:p>
           <a:p>
@@ -6016,16 +6281,472 @@
               </a:spcBef>
             </a:pPr>
             <a:r>
-              <a:rPr lang="en-US" sz="2551" spc="-76">
-                <a:solidFill>
-                  <a:srgbClr val="000000"/>
-                </a:solidFill>
-                <a:latin typeface="ITC Avant Garde Gothic"/>
-                <a:ea typeface="ITC Avant Garde Gothic"/>
-                <a:cs typeface="ITC Avant Garde Gothic"/>
-                <a:sym typeface="ITC Avant Garde Gothic"/>
-              </a:rPr>
-              <a:t> La aplicación cumple con su propósito al permitir realizar operaciones matemáticas básicas y avanzadas, además de almacenar un registro de los resultados en una base de datos para su posterior consulta.</a:t>
+              <a:rPr lang="en-US" sz="2551" spc="-76" dirty="0">
+                <a:solidFill>
+                  <a:srgbClr val="000000"/>
+                </a:solidFill>
+                <a:latin typeface="ITC Avant Garde Gothic"/>
+                <a:ea typeface="ITC Avant Garde Gothic"/>
+                <a:cs typeface="ITC Avant Garde Gothic"/>
+                <a:sym typeface="ITC Avant Garde Gothic"/>
+              </a:rPr>
+              <a:t> La </a:t>
+            </a:r>
+            <a:r>
+              <a:rPr lang="en-US" sz="2551" spc="-76" dirty="0" err="1">
+                <a:solidFill>
+                  <a:srgbClr val="000000"/>
+                </a:solidFill>
+                <a:latin typeface="ITC Avant Garde Gothic"/>
+                <a:ea typeface="ITC Avant Garde Gothic"/>
+                <a:cs typeface="ITC Avant Garde Gothic"/>
+                <a:sym typeface="ITC Avant Garde Gothic"/>
+              </a:rPr>
+              <a:t>aplicación</a:t>
+            </a:r>
+            <a:r>
+              <a:rPr lang="en-US" sz="2551" spc="-76" dirty="0">
+                <a:solidFill>
+                  <a:srgbClr val="000000"/>
+                </a:solidFill>
+                <a:latin typeface="ITC Avant Garde Gothic"/>
+                <a:ea typeface="ITC Avant Garde Gothic"/>
+                <a:cs typeface="ITC Avant Garde Gothic"/>
+                <a:sym typeface="ITC Avant Garde Gothic"/>
+              </a:rPr>
+              <a:t> </a:t>
+            </a:r>
+            <a:r>
+              <a:rPr lang="en-US" sz="2551" spc="-76" dirty="0" err="1">
+                <a:solidFill>
+                  <a:srgbClr val="000000"/>
+                </a:solidFill>
+                <a:latin typeface="ITC Avant Garde Gothic"/>
+                <a:ea typeface="ITC Avant Garde Gothic"/>
+                <a:cs typeface="ITC Avant Garde Gothic"/>
+                <a:sym typeface="ITC Avant Garde Gothic"/>
+              </a:rPr>
+              <a:t>cumple</a:t>
+            </a:r>
+            <a:r>
+              <a:rPr lang="en-US" sz="2551" spc="-76" dirty="0">
+                <a:solidFill>
+                  <a:srgbClr val="000000"/>
+                </a:solidFill>
+                <a:latin typeface="ITC Avant Garde Gothic"/>
+                <a:ea typeface="ITC Avant Garde Gothic"/>
+                <a:cs typeface="ITC Avant Garde Gothic"/>
+                <a:sym typeface="ITC Avant Garde Gothic"/>
+              </a:rPr>
+              <a:t> con </a:t>
+            </a:r>
+            <a:r>
+              <a:rPr lang="en-US" sz="2551" spc="-76" dirty="0" err="1">
+                <a:solidFill>
+                  <a:srgbClr val="000000"/>
+                </a:solidFill>
+                <a:latin typeface="ITC Avant Garde Gothic"/>
+                <a:ea typeface="ITC Avant Garde Gothic"/>
+                <a:cs typeface="ITC Avant Garde Gothic"/>
+                <a:sym typeface="ITC Avant Garde Gothic"/>
+              </a:rPr>
+              <a:t>su</a:t>
+            </a:r>
+            <a:r>
+              <a:rPr lang="en-US" sz="2551" spc="-76" dirty="0">
+                <a:solidFill>
+                  <a:srgbClr val="000000"/>
+                </a:solidFill>
+                <a:latin typeface="ITC Avant Garde Gothic"/>
+                <a:ea typeface="ITC Avant Garde Gothic"/>
+                <a:cs typeface="ITC Avant Garde Gothic"/>
+                <a:sym typeface="ITC Avant Garde Gothic"/>
+              </a:rPr>
+              <a:t> </a:t>
+            </a:r>
+            <a:r>
+              <a:rPr lang="en-US" sz="2551" spc="-76" dirty="0" err="1">
+                <a:solidFill>
+                  <a:srgbClr val="000000"/>
+                </a:solidFill>
+                <a:latin typeface="ITC Avant Garde Gothic"/>
+                <a:ea typeface="ITC Avant Garde Gothic"/>
+                <a:cs typeface="ITC Avant Garde Gothic"/>
+                <a:sym typeface="ITC Avant Garde Gothic"/>
+              </a:rPr>
+              <a:t>propósito</a:t>
+            </a:r>
+            <a:r>
+              <a:rPr lang="en-US" sz="2551" spc="-76" dirty="0">
+                <a:solidFill>
+                  <a:srgbClr val="000000"/>
+                </a:solidFill>
+                <a:latin typeface="ITC Avant Garde Gothic"/>
+                <a:ea typeface="ITC Avant Garde Gothic"/>
+                <a:cs typeface="ITC Avant Garde Gothic"/>
+                <a:sym typeface="ITC Avant Garde Gothic"/>
+              </a:rPr>
+              <a:t> al </a:t>
+            </a:r>
+            <a:r>
+              <a:rPr lang="en-US" sz="2551" spc="-76" dirty="0" err="1">
+                <a:solidFill>
+                  <a:srgbClr val="000000"/>
+                </a:solidFill>
+                <a:latin typeface="ITC Avant Garde Gothic"/>
+                <a:ea typeface="ITC Avant Garde Gothic"/>
+                <a:cs typeface="ITC Avant Garde Gothic"/>
+                <a:sym typeface="ITC Avant Garde Gothic"/>
+              </a:rPr>
+              <a:t>permitir</a:t>
+            </a:r>
+            <a:r>
+              <a:rPr lang="en-US" sz="2551" spc="-76" dirty="0">
+                <a:solidFill>
+                  <a:srgbClr val="000000"/>
+                </a:solidFill>
+                <a:latin typeface="ITC Avant Garde Gothic"/>
+                <a:ea typeface="ITC Avant Garde Gothic"/>
+                <a:cs typeface="ITC Avant Garde Gothic"/>
+                <a:sym typeface="ITC Avant Garde Gothic"/>
+              </a:rPr>
+              <a:t> </a:t>
+            </a:r>
+            <a:r>
+              <a:rPr lang="en-US" sz="2551" spc="-76" dirty="0" err="1">
+                <a:solidFill>
+                  <a:srgbClr val="000000"/>
+                </a:solidFill>
+                <a:latin typeface="ITC Avant Garde Gothic"/>
+                <a:ea typeface="ITC Avant Garde Gothic"/>
+                <a:cs typeface="ITC Avant Garde Gothic"/>
+                <a:sym typeface="ITC Avant Garde Gothic"/>
+              </a:rPr>
+              <a:t>realizar</a:t>
+            </a:r>
+            <a:r>
+              <a:rPr lang="en-US" sz="2551" spc="-76" dirty="0">
+                <a:solidFill>
+                  <a:srgbClr val="000000"/>
+                </a:solidFill>
+                <a:latin typeface="ITC Avant Garde Gothic"/>
+                <a:ea typeface="ITC Avant Garde Gothic"/>
+                <a:cs typeface="ITC Avant Garde Gothic"/>
+                <a:sym typeface="ITC Avant Garde Gothic"/>
+              </a:rPr>
+              <a:t> </a:t>
+            </a:r>
+            <a:r>
+              <a:rPr lang="en-US" sz="2551" spc="-76" dirty="0" err="1">
+                <a:solidFill>
+                  <a:srgbClr val="000000"/>
+                </a:solidFill>
+                <a:latin typeface="ITC Avant Garde Gothic"/>
+                <a:ea typeface="ITC Avant Garde Gothic"/>
+                <a:cs typeface="ITC Avant Garde Gothic"/>
+                <a:sym typeface="ITC Avant Garde Gothic"/>
+              </a:rPr>
+              <a:t>operaciones</a:t>
+            </a:r>
+            <a:r>
+              <a:rPr lang="en-US" sz="2551" spc="-76" dirty="0">
+                <a:solidFill>
+                  <a:srgbClr val="000000"/>
+                </a:solidFill>
+                <a:latin typeface="ITC Avant Garde Gothic"/>
+                <a:ea typeface="ITC Avant Garde Gothic"/>
+                <a:cs typeface="ITC Avant Garde Gothic"/>
+                <a:sym typeface="ITC Avant Garde Gothic"/>
+              </a:rPr>
+              <a:t> </a:t>
+            </a:r>
+            <a:r>
+              <a:rPr lang="en-US" sz="2551" spc="-76" dirty="0" err="1">
+                <a:solidFill>
+                  <a:srgbClr val="000000"/>
+                </a:solidFill>
+                <a:latin typeface="ITC Avant Garde Gothic"/>
+                <a:ea typeface="ITC Avant Garde Gothic"/>
+                <a:cs typeface="ITC Avant Garde Gothic"/>
+                <a:sym typeface="ITC Avant Garde Gothic"/>
+              </a:rPr>
+              <a:t>matemáticas</a:t>
+            </a:r>
+            <a:r>
+              <a:rPr lang="en-US" sz="2551" spc="-76" dirty="0">
+                <a:solidFill>
+                  <a:srgbClr val="000000"/>
+                </a:solidFill>
+                <a:latin typeface="ITC Avant Garde Gothic"/>
+                <a:ea typeface="ITC Avant Garde Gothic"/>
+                <a:cs typeface="ITC Avant Garde Gothic"/>
+                <a:sym typeface="ITC Avant Garde Gothic"/>
+              </a:rPr>
+              <a:t> </a:t>
+            </a:r>
+            <a:r>
+              <a:rPr lang="en-US" sz="2551" spc="-76" dirty="0" err="1">
+                <a:solidFill>
+                  <a:srgbClr val="000000"/>
+                </a:solidFill>
+                <a:latin typeface="ITC Avant Garde Gothic"/>
+                <a:ea typeface="ITC Avant Garde Gothic"/>
+                <a:cs typeface="ITC Avant Garde Gothic"/>
+                <a:sym typeface="ITC Avant Garde Gothic"/>
+              </a:rPr>
+              <a:t>básicas</a:t>
+            </a:r>
+            <a:r>
+              <a:rPr lang="en-US" sz="2551" spc="-76" dirty="0">
+                <a:solidFill>
+                  <a:srgbClr val="000000"/>
+                </a:solidFill>
+                <a:latin typeface="ITC Avant Garde Gothic"/>
+                <a:ea typeface="ITC Avant Garde Gothic"/>
+                <a:cs typeface="ITC Avant Garde Gothic"/>
+                <a:sym typeface="ITC Avant Garde Gothic"/>
+              </a:rPr>
+              <a:t> y </a:t>
+            </a:r>
+            <a:r>
+              <a:rPr lang="en-US" sz="2551" spc="-76" dirty="0" err="1">
+                <a:solidFill>
+                  <a:srgbClr val="000000"/>
+                </a:solidFill>
+                <a:latin typeface="ITC Avant Garde Gothic"/>
+                <a:ea typeface="ITC Avant Garde Gothic"/>
+                <a:cs typeface="ITC Avant Garde Gothic"/>
+                <a:sym typeface="ITC Avant Garde Gothic"/>
+              </a:rPr>
+              <a:t>avanzadas</a:t>
+            </a:r>
+            <a:r>
+              <a:rPr lang="en-US" sz="2551" spc="-76" dirty="0">
+                <a:solidFill>
+                  <a:srgbClr val="000000"/>
+                </a:solidFill>
+                <a:latin typeface="ITC Avant Garde Gothic"/>
+                <a:ea typeface="ITC Avant Garde Gothic"/>
+                <a:cs typeface="ITC Avant Garde Gothic"/>
+                <a:sym typeface="ITC Avant Garde Gothic"/>
+              </a:rPr>
+              <a:t>, </a:t>
+            </a:r>
+            <a:r>
+              <a:rPr lang="en-US" sz="2551" spc="-76" dirty="0" err="1">
+                <a:solidFill>
+                  <a:srgbClr val="000000"/>
+                </a:solidFill>
+                <a:latin typeface="ITC Avant Garde Gothic"/>
+                <a:ea typeface="ITC Avant Garde Gothic"/>
+                <a:cs typeface="ITC Avant Garde Gothic"/>
+                <a:sym typeface="ITC Avant Garde Gothic"/>
+              </a:rPr>
+              <a:t>además</a:t>
+            </a:r>
+            <a:r>
+              <a:rPr lang="en-US" sz="2551" spc="-76" dirty="0">
+                <a:solidFill>
+                  <a:srgbClr val="000000"/>
+                </a:solidFill>
+                <a:latin typeface="ITC Avant Garde Gothic"/>
+                <a:ea typeface="ITC Avant Garde Gothic"/>
+                <a:cs typeface="ITC Avant Garde Gothic"/>
+                <a:sym typeface="ITC Avant Garde Gothic"/>
+              </a:rPr>
+              <a:t> de </a:t>
+            </a:r>
+            <a:r>
+              <a:rPr lang="en-US" sz="2551" spc="-76" dirty="0" err="1">
+                <a:solidFill>
+                  <a:srgbClr val="000000"/>
+                </a:solidFill>
+                <a:latin typeface="ITC Avant Garde Gothic"/>
+                <a:ea typeface="ITC Avant Garde Gothic"/>
+                <a:cs typeface="ITC Avant Garde Gothic"/>
+                <a:sym typeface="ITC Avant Garde Gothic"/>
+              </a:rPr>
+              <a:t>almacenar</a:t>
+            </a:r>
+            <a:r>
+              <a:rPr lang="en-US" sz="2551" spc="-76" dirty="0">
+                <a:solidFill>
+                  <a:srgbClr val="000000"/>
+                </a:solidFill>
+                <a:latin typeface="ITC Avant Garde Gothic"/>
+                <a:ea typeface="ITC Avant Garde Gothic"/>
+                <a:cs typeface="ITC Avant Garde Gothic"/>
+                <a:sym typeface="ITC Avant Garde Gothic"/>
+              </a:rPr>
+              <a:t> un </a:t>
+            </a:r>
+            <a:r>
+              <a:rPr lang="en-US" sz="2551" spc="-76" dirty="0" err="1">
+                <a:solidFill>
+                  <a:srgbClr val="000000"/>
+                </a:solidFill>
+                <a:latin typeface="ITC Avant Garde Gothic"/>
+                <a:ea typeface="ITC Avant Garde Gothic"/>
+                <a:cs typeface="ITC Avant Garde Gothic"/>
+                <a:sym typeface="ITC Avant Garde Gothic"/>
+              </a:rPr>
+              <a:t>registro</a:t>
+            </a:r>
+            <a:r>
+              <a:rPr lang="en-US" sz="2551" spc="-76" dirty="0">
+                <a:solidFill>
+                  <a:srgbClr val="000000"/>
+                </a:solidFill>
+                <a:latin typeface="ITC Avant Garde Gothic"/>
+                <a:ea typeface="ITC Avant Garde Gothic"/>
+                <a:cs typeface="ITC Avant Garde Gothic"/>
+                <a:sym typeface="ITC Avant Garde Gothic"/>
+              </a:rPr>
+              <a:t> de </a:t>
+            </a:r>
+            <a:r>
+              <a:rPr lang="en-US" sz="2551" spc="-76" dirty="0" err="1">
+                <a:solidFill>
+                  <a:srgbClr val="000000"/>
+                </a:solidFill>
+                <a:latin typeface="ITC Avant Garde Gothic"/>
+                <a:ea typeface="ITC Avant Garde Gothic"/>
+                <a:cs typeface="ITC Avant Garde Gothic"/>
+                <a:sym typeface="ITC Avant Garde Gothic"/>
+              </a:rPr>
+              <a:t>los</a:t>
+            </a:r>
+            <a:r>
+              <a:rPr lang="en-US" sz="2551" spc="-76" dirty="0">
+                <a:solidFill>
+                  <a:srgbClr val="000000"/>
+                </a:solidFill>
+                <a:latin typeface="ITC Avant Garde Gothic"/>
+                <a:ea typeface="ITC Avant Garde Gothic"/>
+                <a:cs typeface="ITC Avant Garde Gothic"/>
+                <a:sym typeface="ITC Avant Garde Gothic"/>
+              </a:rPr>
+              <a:t> </a:t>
+            </a:r>
+            <a:r>
+              <a:rPr lang="en-US" sz="2551" spc="-76" dirty="0" err="1">
+                <a:solidFill>
+                  <a:srgbClr val="000000"/>
+                </a:solidFill>
+                <a:latin typeface="ITC Avant Garde Gothic"/>
+                <a:ea typeface="ITC Avant Garde Gothic"/>
+                <a:cs typeface="ITC Avant Garde Gothic"/>
+                <a:sym typeface="ITC Avant Garde Gothic"/>
+              </a:rPr>
+              <a:t>resultados</a:t>
+            </a:r>
+            <a:r>
+              <a:rPr lang="en-US" sz="2551" spc="-76" dirty="0">
+                <a:solidFill>
+                  <a:srgbClr val="000000"/>
+                </a:solidFill>
+                <a:latin typeface="ITC Avant Garde Gothic"/>
+                <a:ea typeface="ITC Avant Garde Gothic"/>
+                <a:cs typeface="ITC Avant Garde Gothic"/>
+                <a:sym typeface="ITC Avant Garde Gothic"/>
+              </a:rPr>
+              <a:t> </a:t>
+            </a:r>
+            <a:r>
+              <a:rPr lang="en-US" sz="2551" spc="-76" dirty="0" err="1">
+                <a:solidFill>
+                  <a:srgbClr val="000000"/>
+                </a:solidFill>
+                <a:latin typeface="ITC Avant Garde Gothic"/>
+                <a:ea typeface="ITC Avant Garde Gothic"/>
+                <a:cs typeface="ITC Avant Garde Gothic"/>
+                <a:sym typeface="ITC Avant Garde Gothic"/>
+              </a:rPr>
+              <a:t>en</a:t>
+            </a:r>
+            <a:r>
+              <a:rPr lang="en-US" sz="2551" spc="-76" dirty="0">
+                <a:solidFill>
+                  <a:srgbClr val="000000"/>
+                </a:solidFill>
+                <a:latin typeface="ITC Avant Garde Gothic"/>
+                <a:ea typeface="ITC Avant Garde Gothic"/>
+                <a:cs typeface="ITC Avant Garde Gothic"/>
+                <a:sym typeface="ITC Avant Garde Gothic"/>
+              </a:rPr>
+              <a:t> </a:t>
+            </a:r>
+            <a:r>
+              <a:rPr lang="en-US" sz="2551" spc="-76" dirty="0" err="1">
+                <a:solidFill>
+                  <a:srgbClr val="000000"/>
+                </a:solidFill>
+                <a:latin typeface="ITC Avant Garde Gothic"/>
+                <a:ea typeface="ITC Avant Garde Gothic"/>
+                <a:cs typeface="ITC Avant Garde Gothic"/>
+                <a:sym typeface="ITC Avant Garde Gothic"/>
+              </a:rPr>
+              <a:t>una</a:t>
+            </a:r>
+            <a:r>
+              <a:rPr lang="en-US" sz="2551" spc="-76" dirty="0">
+                <a:solidFill>
+                  <a:srgbClr val="000000"/>
+                </a:solidFill>
+                <a:latin typeface="ITC Avant Garde Gothic"/>
+                <a:ea typeface="ITC Avant Garde Gothic"/>
+                <a:cs typeface="ITC Avant Garde Gothic"/>
+                <a:sym typeface="ITC Avant Garde Gothic"/>
+              </a:rPr>
+              <a:t> base de </a:t>
+            </a:r>
+            <a:r>
+              <a:rPr lang="en-US" sz="2551" spc="-76" dirty="0" err="1">
+                <a:solidFill>
+                  <a:srgbClr val="000000"/>
+                </a:solidFill>
+                <a:latin typeface="ITC Avant Garde Gothic"/>
+                <a:ea typeface="ITC Avant Garde Gothic"/>
+                <a:cs typeface="ITC Avant Garde Gothic"/>
+                <a:sym typeface="ITC Avant Garde Gothic"/>
+              </a:rPr>
+              <a:t>datos</a:t>
+            </a:r>
+            <a:r>
+              <a:rPr lang="en-US" sz="2551" spc="-76" dirty="0">
+                <a:solidFill>
+                  <a:srgbClr val="000000"/>
+                </a:solidFill>
+                <a:latin typeface="ITC Avant Garde Gothic"/>
+                <a:ea typeface="ITC Avant Garde Gothic"/>
+                <a:cs typeface="ITC Avant Garde Gothic"/>
+                <a:sym typeface="ITC Avant Garde Gothic"/>
+              </a:rPr>
+              <a:t> para </a:t>
+            </a:r>
+            <a:r>
+              <a:rPr lang="en-US" sz="2551" spc="-76" dirty="0" err="1">
+                <a:solidFill>
+                  <a:srgbClr val="000000"/>
+                </a:solidFill>
+                <a:latin typeface="ITC Avant Garde Gothic"/>
+                <a:ea typeface="ITC Avant Garde Gothic"/>
+                <a:cs typeface="ITC Avant Garde Gothic"/>
+                <a:sym typeface="ITC Avant Garde Gothic"/>
+              </a:rPr>
+              <a:t>su</a:t>
+            </a:r>
+            <a:r>
+              <a:rPr lang="en-US" sz="2551" spc="-76" dirty="0">
+                <a:solidFill>
+                  <a:srgbClr val="000000"/>
+                </a:solidFill>
+                <a:latin typeface="ITC Avant Garde Gothic"/>
+                <a:ea typeface="ITC Avant Garde Gothic"/>
+                <a:cs typeface="ITC Avant Garde Gothic"/>
+                <a:sym typeface="ITC Avant Garde Gothic"/>
+              </a:rPr>
+              <a:t> posterior consulta.</a:t>
             </a:r>
           </a:p>
           <a:p>
@@ -6038,16 +6759,304 @@
               </a:spcBef>
             </a:pPr>
             <a:r>
-              <a:rPr lang="en-US" sz="2551" spc="-76">
-                <a:solidFill>
-                  <a:srgbClr val="000000"/>
-                </a:solidFill>
-                <a:latin typeface="ITC Avant Garde Gothic"/>
-                <a:ea typeface="ITC Avant Garde Gothic"/>
-                <a:cs typeface="ITC Avant Garde Gothic"/>
-                <a:sym typeface="ITC Avant Garde Gothic"/>
-              </a:rPr>
-              <a:t> Gracias a la combinación de C# con Windows Forms y SQL Server, se obtiene una calculadora funcional, visualmente amigable y con un manejo adecuado de los datos y errores.</a:t>
+              <a:rPr lang="en-US" sz="2551" spc="-76" dirty="0">
+                <a:solidFill>
+                  <a:srgbClr val="000000"/>
+                </a:solidFill>
+                <a:latin typeface="ITC Avant Garde Gothic"/>
+                <a:ea typeface="ITC Avant Garde Gothic"/>
+                <a:cs typeface="ITC Avant Garde Gothic"/>
+                <a:sym typeface="ITC Avant Garde Gothic"/>
+              </a:rPr>
+              <a:t> Gracias a la </a:t>
+            </a:r>
+            <a:r>
+              <a:rPr lang="en-US" sz="2551" spc="-76" dirty="0" err="1">
+                <a:solidFill>
+                  <a:srgbClr val="000000"/>
+                </a:solidFill>
+                <a:latin typeface="ITC Avant Garde Gothic"/>
+                <a:ea typeface="ITC Avant Garde Gothic"/>
+                <a:cs typeface="ITC Avant Garde Gothic"/>
+                <a:sym typeface="ITC Avant Garde Gothic"/>
+              </a:rPr>
+              <a:t>combinación</a:t>
+            </a:r>
+            <a:r>
+              <a:rPr lang="en-US" sz="2551" spc="-76" dirty="0">
+                <a:solidFill>
+                  <a:srgbClr val="000000"/>
+                </a:solidFill>
+                <a:latin typeface="ITC Avant Garde Gothic"/>
+                <a:ea typeface="ITC Avant Garde Gothic"/>
+                <a:cs typeface="ITC Avant Garde Gothic"/>
+                <a:sym typeface="ITC Avant Garde Gothic"/>
+              </a:rPr>
+              <a:t> de C# con Windows Forms y SQL Server, se </a:t>
+            </a:r>
+            <a:r>
+              <a:rPr lang="en-US" sz="2551" spc="-76" dirty="0" err="1">
+                <a:solidFill>
+                  <a:srgbClr val="000000"/>
+                </a:solidFill>
+                <a:latin typeface="ITC Avant Garde Gothic"/>
+                <a:ea typeface="ITC Avant Garde Gothic"/>
+                <a:cs typeface="ITC Avant Garde Gothic"/>
+                <a:sym typeface="ITC Avant Garde Gothic"/>
+              </a:rPr>
+              <a:t>obtiene</a:t>
+            </a:r>
+            <a:r>
+              <a:rPr lang="en-US" sz="2551" spc="-76" dirty="0">
+                <a:solidFill>
+                  <a:srgbClr val="000000"/>
+                </a:solidFill>
+                <a:latin typeface="ITC Avant Garde Gothic"/>
+                <a:ea typeface="ITC Avant Garde Gothic"/>
+                <a:cs typeface="ITC Avant Garde Gothic"/>
+                <a:sym typeface="ITC Avant Garde Gothic"/>
+              </a:rPr>
+              <a:t> </a:t>
+            </a:r>
+            <a:r>
+              <a:rPr lang="en-US" sz="2551" spc="-76" dirty="0" err="1">
+                <a:solidFill>
+                  <a:srgbClr val="000000"/>
+                </a:solidFill>
+                <a:latin typeface="ITC Avant Garde Gothic"/>
+                <a:ea typeface="ITC Avant Garde Gothic"/>
+                <a:cs typeface="ITC Avant Garde Gothic"/>
+                <a:sym typeface="ITC Avant Garde Gothic"/>
+              </a:rPr>
+              <a:t>una</a:t>
+            </a:r>
+            <a:r>
+              <a:rPr lang="en-US" sz="2551" spc="-76" dirty="0">
+                <a:solidFill>
+                  <a:srgbClr val="000000"/>
+                </a:solidFill>
+                <a:latin typeface="ITC Avant Garde Gothic"/>
+                <a:ea typeface="ITC Avant Garde Gothic"/>
+                <a:cs typeface="ITC Avant Garde Gothic"/>
+                <a:sym typeface="ITC Avant Garde Gothic"/>
+              </a:rPr>
+              <a:t> </a:t>
+            </a:r>
+            <a:r>
+              <a:rPr lang="en-US" sz="2551" spc="-76" dirty="0" err="1">
+                <a:solidFill>
+                  <a:srgbClr val="000000"/>
+                </a:solidFill>
+                <a:latin typeface="ITC Avant Garde Gothic"/>
+                <a:ea typeface="ITC Avant Garde Gothic"/>
+                <a:cs typeface="ITC Avant Garde Gothic"/>
+                <a:sym typeface="ITC Avant Garde Gothic"/>
+              </a:rPr>
+              <a:t>calculadora</a:t>
+            </a:r>
+            <a:r>
+              <a:rPr lang="en-US" sz="2551" spc="-76" dirty="0">
+                <a:solidFill>
+                  <a:srgbClr val="000000"/>
+                </a:solidFill>
+                <a:latin typeface="ITC Avant Garde Gothic"/>
+                <a:ea typeface="ITC Avant Garde Gothic"/>
+                <a:cs typeface="ITC Avant Garde Gothic"/>
+                <a:sym typeface="ITC Avant Garde Gothic"/>
+              </a:rPr>
+              <a:t> </a:t>
+            </a:r>
+            <a:r>
+              <a:rPr lang="en-US" sz="2551" spc="-76" dirty="0" err="1">
+                <a:solidFill>
+                  <a:srgbClr val="000000"/>
+                </a:solidFill>
+                <a:latin typeface="ITC Avant Garde Gothic"/>
+                <a:ea typeface="ITC Avant Garde Gothic"/>
+                <a:cs typeface="ITC Avant Garde Gothic"/>
+                <a:sym typeface="ITC Avant Garde Gothic"/>
+              </a:rPr>
+              <a:t>funcional</a:t>
+            </a:r>
+            <a:r>
+              <a:rPr lang="en-US" sz="2551" spc="-76" dirty="0">
+                <a:solidFill>
+                  <a:srgbClr val="000000"/>
+                </a:solidFill>
+                <a:latin typeface="ITC Avant Garde Gothic"/>
+                <a:ea typeface="ITC Avant Garde Gothic"/>
+                <a:cs typeface="ITC Avant Garde Gothic"/>
+                <a:sym typeface="ITC Avant Garde Gothic"/>
+              </a:rPr>
+              <a:t>, </a:t>
+            </a:r>
+            <a:r>
+              <a:rPr lang="en-US" sz="2551" spc="-76" dirty="0" err="1">
+                <a:solidFill>
+                  <a:srgbClr val="000000"/>
+                </a:solidFill>
+                <a:latin typeface="ITC Avant Garde Gothic"/>
+                <a:ea typeface="ITC Avant Garde Gothic"/>
+                <a:cs typeface="ITC Avant Garde Gothic"/>
+                <a:sym typeface="ITC Avant Garde Gothic"/>
+              </a:rPr>
+              <a:t>visualmente</a:t>
+            </a:r>
+            <a:r>
+              <a:rPr lang="en-US" sz="2551" spc="-76" dirty="0">
+                <a:solidFill>
+                  <a:srgbClr val="000000"/>
+                </a:solidFill>
+                <a:latin typeface="ITC Avant Garde Gothic"/>
+                <a:ea typeface="ITC Avant Garde Gothic"/>
+                <a:cs typeface="ITC Avant Garde Gothic"/>
+                <a:sym typeface="ITC Avant Garde Gothic"/>
+              </a:rPr>
+              <a:t> </a:t>
+            </a:r>
+            <a:r>
+              <a:rPr lang="en-US" sz="2551" spc="-76" dirty="0" err="1">
+                <a:solidFill>
+                  <a:srgbClr val="000000"/>
+                </a:solidFill>
+                <a:latin typeface="ITC Avant Garde Gothic"/>
+                <a:ea typeface="ITC Avant Garde Gothic"/>
+                <a:cs typeface="ITC Avant Garde Gothic"/>
+                <a:sym typeface="ITC Avant Garde Gothic"/>
+              </a:rPr>
+              <a:t>amigable</a:t>
+            </a:r>
+            <a:r>
+              <a:rPr lang="en-US" sz="2551" spc="-76" dirty="0">
+                <a:solidFill>
+                  <a:srgbClr val="000000"/>
+                </a:solidFill>
+                <a:latin typeface="ITC Avant Garde Gothic"/>
+                <a:ea typeface="ITC Avant Garde Gothic"/>
+                <a:cs typeface="ITC Avant Garde Gothic"/>
+                <a:sym typeface="ITC Avant Garde Gothic"/>
+              </a:rPr>
+              <a:t> y con un </a:t>
+            </a:r>
+            <a:r>
+              <a:rPr lang="en-US" sz="2551" spc="-76" dirty="0" err="1">
+                <a:solidFill>
+                  <a:srgbClr val="000000"/>
+                </a:solidFill>
+                <a:latin typeface="ITC Avant Garde Gothic"/>
+                <a:ea typeface="ITC Avant Garde Gothic"/>
+                <a:cs typeface="ITC Avant Garde Gothic"/>
+                <a:sym typeface="ITC Avant Garde Gothic"/>
+              </a:rPr>
+              <a:t>manejo</a:t>
+            </a:r>
+            <a:r>
+              <a:rPr lang="en-US" sz="2551" spc="-76" dirty="0">
+                <a:solidFill>
+                  <a:srgbClr val="000000"/>
+                </a:solidFill>
+                <a:latin typeface="ITC Avant Garde Gothic"/>
+                <a:ea typeface="ITC Avant Garde Gothic"/>
+                <a:cs typeface="ITC Avant Garde Gothic"/>
+                <a:sym typeface="ITC Avant Garde Gothic"/>
+              </a:rPr>
+              <a:t> </a:t>
+            </a:r>
+            <a:r>
+              <a:rPr lang="en-US" sz="2551" spc="-76" dirty="0" err="1">
+                <a:solidFill>
+                  <a:srgbClr val="000000"/>
+                </a:solidFill>
+                <a:latin typeface="ITC Avant Garde Gothic"/>
+                <a:ea typeface="ITC Avant Garde Gothic"/>
+                <a:cs typeface="ITC Avant Garde Gothic"/>
+                <a:sym typeface="ITC Avant Garde Gothic"/>
+              </a:rPr>
+              <a:t>adecuado</a:t>
+            </a:r>
+            <a:r>
+              <a:rPr lang="en-US" sz="2551" spc="-76" dirty="0">
+                <a:solidFill>
+                  <a:srgbClr val="000000"/>
+                </a:solidFill>
+                <a:latin typeface="ITC Avant Garde Gothic"/>
+                <a:ea typeface="ITC Avant Garde Gothic"/>
+                <a:cs typeface="ITC Avant Garde Gothic"/>
+                <a:sym typeface="ITC Avant Garde Gothic"/>
+              </a:rPr>
+              <a:t> de </a:t>
+            </a:r>
+            <a:r>
+              <a:rPr lang="en-US" sz="2551" spc="-76" dirty="0" err="1">
+                <a:solidFill>
+                  <a:srgbClr val="000000"/>
+                </a:solidFill>
+                <a:latin typeface="ITC Avant Garde Gothic"/>
+                <a:ea typeface="ITC Avant Garde Gothic"/>
+                <a:cs typeface="ITC Avant Garde Gothic"/>
+                <a:sym typeface="ITC Avant Garde Gothic"/>
+              </a:rPr>
+              <a:t>los</a:t>
+            </a:r>
+            <a:r>
+              <a:rPr lang="en-US" sz="2551" spc="-76" dirty="0">
+                <a:solidFill>
+                  <a:srgbClr val="000000"/>
+                </a:solidFill>
+                <a:latin typeface="ITC Avant Garde Gothic"/>
+                <a:ea typeface="ITC Avant Garde Gothic"/>
+                <a:cs typeface="ITC Avant Garde Gothic"/>
+                <a:sym typeface="ITC Avant Garde Gothic"/>
+              </a:rPr>
+              <a:t> </a:t>
+            </a:r>
+            <a:r>
+              <a:rPr lang="en-US" sz="2551" spc="-76" dirty="0" err="1">
+                <a:solidFill>
+                  <a:srgbClr val="000000"/>
+                </a:solidFill>
+                <a:latin typeface="ITC Avant Garde Gothic"/>
+                <a:ea typeface="ITC Avant Garde Gothic"/>
+                <a:cs typeface="ITC Avant Garde Gothic"/>
+                <a:sym typeface="ITC Avant Garde Gothic"/>
+              </a:rPr>
+              <a:t>datos</a:t>
+            </a:r>
+            <a:r>
+              <a:rPr lang="en-US" sz="2551" spc="-76" dirty="0">
+                <a:solidFill>
+                  <a:srgbClr val="000000"/>
+                </a:solidFill>
+                <a:latin typeface="ITC Avant Garde Gothic"/>
+                <a:ea typeface="ITC Avant Garde Gothic"/>
+                <a:cs typeface="ITC Avant Garde Gothic"/>
+                <a:sym typeface="ITC Avant Garde Gothic"/>
+              </a:rPr>
+              <a:t> y </a:t>
+            </a:r>
+            <a:r>
+              <a:rPr lang="en-US" sz="2551" spc="-76" dirty="0" err="1">
+                <a:solidFill>
+                  <a:srgbClr val="000000"/>
+                </a:solidFill>
+                <a:latin typeface="ITC Avant Garde Gothic"/>
+                <a:ea typeface="ITC Avant Garde Gothic"/>
+                <a:cs typeface="ITC Avant Garde Gothic"/>
+                <a:sym typeface="ITC Avant Garde Gothic"/>
+              </a:rPr>
+              <a:t>errores</a:t>
+            </a:r>
+            <a:r>
+              <a:rPr lang="en-US" sz="2551" spc="-76" dirty="0">
+                <a:solidFill>
+                  <a:srgbClr val="000000"/>
+                </a:solidFill>
+                <a:latin typeface="ITC Avant Garde Gothic"/>
+                <a:ea typeface="ITC Avant Garde Gothic"/>
+                <a:cs typeface="ITC Avant Garde Gothic"/>
+                <a:sym typeface="ITC Avant Garde Gothic"/>
+              </a:rPr>
+              <a:t>.</a:t>
             </a:r>
           </a:p>
           <a:p>
@@ -6060,16 +7069,376 @@
               </a:spcBef>
             </a:pPr>
             <a:r>
-              <a:rPr lang="en-US" sz="2551" spc="-76">
-                <a:solidFill>
-                  <a:srgbClr val="000000"/>
-                </a:solidFill>
-                <a:latin typeface="ITC Avant Garde Gothic"/>
-                <a:ea typeface="ITC Avant Garde Gothic"/>
-                <a:cs typeface="ITC Avant Garde Gothic"/>
-                <a:sym typeface="ITC Avant Garde Gothic"/>
-              </a:rPr>
-              <a:t> En conjunto, el sistema representa una solución práctica y bien estructurada que demuestra el uso coordinado de distintas herramientas de desarrollo.</a:t>
+              <a:rPr lang="en-US" sz="2551" spc="-76" dirty="0">
+                <a:solidFill>
+                  <a:srgbClr val="000000"/>
+                </a:solidFill>
+                <a:latin typeface="ITC Avant Garde Gothic"/>
+                <a:ea typeface="ITC Avant Garde Gothic"/>
+                <a:cs typeface="ITC Avant Garde Gothic"/>
+                <a:sym typeface="ITC Avant Garde Gothic"/>
+              </a:rPr>
+              <a:t> En conjunto, </a:t>
+            </a:r>
+            <a:r>
+              <a:rPr lang="en-US" sz="2551" spc="-76" dirty="0" err="1">
+                <a:solidFill>
+                  <a:srgbClr val="000000"/>
+                </a:solidFill>
+                <a:latin typeface="ITC Avant Garde Gothic"/>
+                <a:ea typeface="ITC Avant Garde Gothic"/>
+                <a:cs typeface="ITC Avant Garde Gothic"/>
+                <a:sym typeface="ITC Avant Garde Gothic"/>
+              </a:rPr>
+              <a:t>el</a:t>
+            </a:r>
+            <a:r>
+              <a:rPr lang="en-US" sz="2551" spc="-76" dirty="0">
+                <a:solidFill>
+                  <a:srgbClr val="000000"/>
+                </a:solidFill>
+                <a:latin typeface="ITC Avant Garde Gothic"/>
+                <a:ea typeface="ITC Avant Garde Gothic"/>
+                <a:cs typeface="ITC Avant Garde Gothic"/>
+                <a:sym typeface="ITC Avant Garde Gothic"/>
+              </a:rPr>
+              <a:t> </a:t>
+            </a:r>
+            <a:r>
+              <a:rPr lang="en-US" sz="2551" spc="-76" dirty="0" err="1">
+                <a:solidFill>
+                  <a:srgbClr val="000000"/>
+                </a:solidFill>
+                <a:latin typeface="ITC Avant Garde Gothic"/>
+                <a:ea typeface="ITC Avant Garde Gothic"/>
+                <a:cs typeface="ITC Avant Garde Gothic"/>
+                <a:sym typeface="ITC Avant Garde Gothic"/>
+              </a:rPr>
+              <a:t>sistema</a:t>
+            </a:r>
+            <a:r>
+              <a:rPr lang="en-US" sz="2551" spc="-76" dirty="0">
+                <a:solidFill>
+                  <a:srgbClr val="000000"/>
+                </a:solidFill>
+                <a:latin typeface="ITC Avant Garde Gothic"/>
+                <a:ea typeface="ITC Avant Garde Gothic"/>
+                <a:cs typeface="ITC Avant Garde Gothic"/>
+                <a:sym typeface="ITC Avant Garde Gothic"/>
+              </a:rPr>
+              <a:t> </a:t>
+            </a:r>
+            <a:r>
+              <a:rPr lang="en-US" sz="2551" spc="-76" dirty="0" err="1">
+                <a:solidFill>
+                  <a:srgbClr val="000000"/>
+                </a:solidFill>
+                <a:latin typeface="ITC Avant Garde Gothic"/>
+                <a:ea typeface="ITC Avant Garde Gothic"/>
+                <a:cs typeface="ITC Avant Garde Gothic"/>
+                <a:sym typeface="ITC Avant Garde Gothic"/>
+              </a:rPr>
+              <a:t>representa</a:t>
+            </a:r>
+            <a:r>
+              <a:rPr lang="en-US" sz="2551" spc="-76" dirty="0">
+                <a:solidFill>
+                  <a:srgbClr val="000000"/>
+                </a:solidFill>
+                <a:latin typeface="ITC Avant Garde Gothic"/>
+                <a:ea typeface="ITC Avant Garde Gothic"/>
+                <a:cs typeface="ITC Avant Garde Gothic"/>
+                <a:sym typeface="ITC Avant Garde Gothic"/>
+              </a:rPr>
+              <a:t> </a:t>
+            </a:r>
+            <a:r>
+              <a:rPr lang="en-US" sz="2551" spc="-76" dirty="0" err="1">
+                <a:solidFill>
+                  <a:srgbClr val="000000"/>
+                </a:solidFill>
+                <a:latin typeface="ITC Avant Garde Gothic"/>
+                <a:ea typeface="ITC Avant Garde Gothic"/>
+                <a:cs typeface="ITC Avant Garde Gothic"/>
+                <a:sym typeface="ITC Avant Garde Gothic"/>
+              </a:rPr>
+              <a:t>una</a:t>
+            </a:r>
+            <a:r>
+              <a:rPr lang="en-US" sz="2551" spc="-76" dirty="0">
+                <a:solidFill>
+                  <a:srgbClr val="000000"/>
+                </a:solidFill>
+                <a:latin typeface="ITC Avant Garde Gothic"/>
+                <a:ea typeface="ITC Avant Garde Gothic"/>
+                <a:cs typeface="ITC Avant Garde Gothic"/>
+                <a:sym typeface="ITC Avant Garde Gothic"/>
+              </a:rPr>
+              <a:t> </a:t>
+            </a:r>
+            <a:r>
+              <a:rPr lang="en-US" sz="2551" spc="-76" dirty="0" err="1">
+                <a:solidFill>
+                  <a:srgbClr val="000000"/>
+                </a:solidFill>
+                <a:latin typeface="ITC Avant Garde Gothic"/>
+                <a:ea typeface="ITC Avant Garde Gothic"/>
+                <a:cs typeface="ITC Avant Garde Gothic"/>
+                <a:sym typeface="ITC Avant Garde Gothic"/>
+              </a:rPr>
+              <a:t>solución</a:t>
+            </a:r>
+            <a:r>
+              <a:rPr lang="en-US" sz="2551" spc="-76" dirty="0">
+                <a:solidFill>
+                  <a:srgbClr val="000000"/>
+                </a:solidFill>
+                <a:latin typeface="ITC Avant Garde Gothic"/>
+                <a:ea typeface="ITC Avant Garde Gothic"/>
+                <a:cs typeface="ITC Avant Garde Gothic"/>
+                <a:sym typeface="ITC Avant Garde Gothic"/>
+              </a:rPr>
+              <a:t> </a:t>
+            </a:r>
+            <a:r>
+              <a:rPr lang="en-US" sz="2551" spc="-76" dirty="0" err="1">
+                <a:solidFill>
+                  <a:srgbClr val="000000"/>
+                </a:solidFill>
+                <a:latin typeface="ITC Avant Garde Gothic"/>
+                <a:ea typeface="ITC Avant Garde Gothic"/>
+                <a:cs typeface="ITC Avant Garde Gothic"/>
+                <a:sym typeface="ITC Avant Garde Gothic"/>
+              </a:rPr>
+              <a:t>práctica</a:t>
+            </a:r>
+            <a:r>
+              <a:rPr lang="en-US" sz="2551" spc="-76" dirty="0">
+                <a:solidFill>
+                  <a:srgbClr val="000000"/>
+                </a:solidFill>
+                <a:latin typeface="ITC Avant Garde Gothic"/>
+                <a:ea typeface="ITC Avant Garde Gothic"/>
+                <a:cs typeface="ITC Avant Garde Gothic"/>
+                <a:sym typeface="ITC Avant Garde Gothic"/>
+              </a:rPr>
+              <a:t> y bien </a:t>
+            </a:r>
+            <a:r>
+              <a:rPr lang="en-US" sz="2551" spc="-76" dirty="0" err="1">
+                <a:solidFill>
+                  <a:srgbClr val="000000"/>
+                </a:solidFill>
+                <a:latin typeface="ITC Avant Garde Gothic"/>
+                <a:ea typeface="ITC Avant Garde Gothic"/>
+                <a:cs typeface="ITC Avant Garde Gothic"/>
+                <a:sym typeface="ITC Avant Garde Gothic"/>
+              </a:rPr>
+              <a:t>estructurada</a:t>
+            </a:r>
+            <a:r>
+              <a:rPr lang="en-US" sz="2551" spc="-76" dirty="0">
+                <a:solidFill>
+                  <a:srgbClr val="000000"/>
+                </a:solidFill>
+                <a:latin typeface="ITC Avant Garde Gothic"/>
+                <a:ea typeface="ITC Avant Garde Gothic"/>
+                <a:cs typeface="ITC Avant Garde Gothic"/>
+                <a:sym typeface="ITC Avant Garde Gothic"/>
+              </a:rPr>
+              <a:t> </a:t>
+            </a:r>
+            <a:r>
+              <a:rPr lang="en-US" sz="2551" spc="-76" dirty="0" err="1">
+                <a:solidFill>
+                  <a:srgbClr val="000000"/>
+                </a:solidFill>
+                <a:latin typeface="ITC Avant Garde Gothic"/>
+                <a:ea typeface="ITC Avant Garde Gothic"/>
+                <a:cs typeface="ITC Avant Garde Gothic"/>
+                <a:sym typeface="ITC Avant Garde Gothic"/>
+              </a:rPr>
+              <a:t>que</a:t>
+            </a:r>
+            <a:r>
+              <a:rPr lang="en-US" sz="2551" spc="-76" dirty="0">
+                <a:solidFill>
+                  <a:srgbClr val="000000"/>
+                </a:solidFill>
+                <a:latin typeface="ITC Avant Garde Gothic"/>
+                <a:ea typeface="ITC Avant Garde Gothic"/>
+                <a:cs typeface="ITC Avant Garde Gothic"/>
+                <a:sym typeface="ITC Avant Garde Gothic"/>
+              </a:rPr>
+              <a:t> </a:t>
+            </a:r>
+            <a:r>
+              <a:rPr lang="en-US" sz="2551" spc="-76" dirty="0" err="1">
+                <a:solidFill>
+                  <a:srgbClr val="000000"/>
+                </a:solidFill>
+                <a:latin typeface="ITC Avant Garde Gothic"/>
+                <a:ea typeface="ITC Avant Garde Gothic"/>
+                <a:cs typeface="ITC Avant Garde Gothic"/>
+                <a:sym typeface="ITC Avant Garde Gothic"/>
+              </a:rPr>
+              <a:t>demuestra</a:t>
+            </a:r>
+            <a:r>
+              <a:rPr lang="en-US" sz="2551" spc="-76" dirty="0">
+                <a:solidFill>
+                  <a:srgbClr val="000000"/>
+                </a:solidFill>
+                <a:latin typeface="ITC Avant Garde Gothic"/>
+                <a:ea typeface="ITC Avant Garde Gothic"/>
+                <a:cs typeface="ITC Avant Garde Gothic"/>
+                <a:sym typeface="ITC Avant Garde Gothic"/>
+              </a:rPr>
+              <a:t> </a:t>
+            </a:r>
+            <a:r>
+              <a:rPr lang="en-US" sz="2551" spc="-76" dirty="0" err="1">
+                <a:solidFill>
+                  <a:srgbClr val="000000"/>
+                </a:solidFill>
+                <a:latin typeface="ITC Avant Garde Gothic"/>
+                <a:ea typeface="ITC Avant Garde Gothic"/>
+                <a:cs typeface="ITC Avant Garde Gothic"/>
+                <a:sym typeface="ITC Avant Garde Gothic"/>
+              </a:rPr>
+              <a:t>el</a:t>
+            </a:r>
+            <a:r>
+              <a:rPr lang="en-US" sz="2551" spc="-76" dirty="0">
+                <a:solidFill>
+                  <a:srgbClr val="000000"/>
+                </a:solidFill>
+                <a:latin typeface="ITC Avant Garde Gothic"/>
+                <a:ea typeface="ITC Avant Garde Gothic"/>
+                <a:cs typeface="ITC Avant Garde Gothic"/>
+                <a:sym typeface="ITC Avant Garde Gothic"/>
+              </a:rPr>
+              <a:t> </a:t>
+            </a:r>
+            <a:r>
+              <a:rPr lang="en-US" sz="2551" spc="-76" dirty="0" err="1">
+                <a:solidFill>
+                  <a:srgbClr val="000000"/>
+                </a:solidFill>
+                <a:latin typeface="ITC Avant Garde Gothic"/>
+                <a:ea typeface="ITC Avant Garde Gothic"/>
+                <a:cs typeface="ITC Avant Garde Gothic"/>
+                <a:sym typeface="ITC Avant Garde Gothic"/>
+              </a:rPr>
+              <a:t>uso</a:t>
+            </a:r>
+            <a:r>
+              <a:rPr lang="en-US" sz="2551" spc="-76" dirty="0">
+                <a:solidFill>
+                  <a:srgbClr val="000000"/>
+                </a:solidFill>
+                <a:latin typeface="ITC Avant Garde Gothic"/>
+                <a:ea typeface="ITC Avant Garde Gothic"/>
+                <a:cs typeface="ITC Avant Garde Gothic"/>
+                <a:sym typeface="ITC Avant Garde Gothic"/>
+              </a:rPr>
+              <a:t> </a:t>
+            </a:r>
+            <a:r>
+              <a:rPr lang="en-US" sz="2551" spc="-76" dirty="0" err="1">
+                <a:solidFill>
+                  <a:srgbClr val="000000"/>
+                </a:solidFill>
+                <a:latin typeface="ITC Avant Garde Gothic"/>
+                <a:ea typeface="ITC Avant Garde Gothic"/>
+                <a:cs typeface="ITC Avant Garde Gothic"/>
+                <a:sym typeface="ITC Avant Garde Gothic"/>
+              </a:rPr>
+              <a:t>coordinado</a:t>
+            </a:r>
+            <a:r>
+              <a:rPr lang="en-US" sz="2551" spc="-76" dirty="0">
+                <a:solidFill>
+                  <a:srgbClr val="000000"/>
+                </a:solidFill>
+                <a:latin typeface="ITC Avant Garde Gothic"/>
+                <a:ea typeface="ITC Avant Garde Gothic"/>
+                <a:cs typeface="ITC Avant Garde Gothic"/>
+                <a:sym typeface="ITC Avant Garde Gothic"/>
+              </a:rPr>
+              <a:t> de </a:t>
+            </a:r>
+            <a:r>
+              <a:rPr lang="en-US" sz="2551" spc="-76" dirty="0" err="1">
+                <a:solidFill>
+                  <a:srgbClr val="000000"/>
+                </a:solidFill>
+                <a:latin typeface="ITC Avant Garde Gothic"/>
+                <a:ea typeface="ITC Avant Garde Gothic"/>
+                <a:cs typeface="ITC Avant Garde Gothic"/>
+                <a:sym typeface="ITC Avant Garde Gothic"/>
+              </a:rPr>
+              <a:t>distintas</a:t>
+            </a:r>
+            <a:r>
+              <a:rPr lang="en-US" sz="2551" spc="-76" dirty="0">
+                <a:solidFill>
+                  <a:srgbClr val="000000"/>
+                </a:solidFill>
+                <a:latin typeface="ITC Avant Garde Gothic"/>
+                <a:ea typeface="ITC Avant Garde Gothic"/>
+                <a:cs typeface="ITC Avant Garde Gothic"/>
+                <a:sym typeface="ITC Avant Garde Gothic"/>
+              </a:rPr>
+              <a:t> </a:t>
+            </a:r>
+            <a:r>
+              <a:rPr lang="en-US" sz="2551" spc="-76" dirty="0" err="1">
+                <a:solidFill>
+                  <a:srgbClr val="000000"/>
+                </a:solidFill>
+                <a:latin typeface="ITC Avant Garde Gothic"/>
+                <a:ea typeface="ITC Avant Garde Gothic"/>
+                <a:cs typeface="ITC Avant Garde Gothic"/>
+                <a:sym typeface="ITC Avant Garde Gothic"/>
+              </a:rPr>
+              <a:t>herramientas</a:t>
+            </a:r>
+            <a:r>
+              <a:rPr lang="en-US" sz="2551" spc="-76" dirty="0">
+                <a:solidFill>
+                  <a:srgbClr val="000000"/>
+                </a:solidFill>
+                <a:latin typeface="ITC Avant Garde Gothic"/>
+                <a:ea typeface="ITC Avant Garde Gothic"/>
+                <a:cs typeface="ITC Avant Garde Gothic"/>
+                <a:sym typeface="ITC Avant Garde Gothic"/>
+              </a:rPr>
+              <a:t> de </a:t>
+            </a:r>
+            <a:r>
+              <a:rPr lang="en-US" sz="2551" spc="-76" dirty="0" err="1">
+                <a:solidFill>
+                  <a:srgbClr val="000000"/>
+                </a:solidFill>
+                <a:latin typeface="ITC Avant Garde Gothic"/>
+                <a:ea typeface="ITC Avant Garde Gothic"/>
+                <a:cs typeface="ITC Avant Garde Gothic"/>
+                <a:sym typeface="ITC Avant Garde Gothic"/>
+              </a:rPr>
+              <a:t>desarrollo</a:t>
+            </a:r>
+            <a:r>
+              <a:rPr lang="en-US" sz="2551" spc="-76" dirty="0">
+                <a:solidFill>
+                  <a:srgbClr val="000000"/>
+                </a:solidFill>
+                <a:latin typeface="ITC Avant Garde Gothic"/>
+                <a:ea typeface="ITC Avant Garde Gothic"/>
+                <a:cs typeface="ITC Avant Garde Gothic"/>
+                <a:sym typeface="ITC Avant Garde Gothic"/>
+              </a:rPr>
+              <a:t>.</a:t>
             </a:r>
           </a:p>
         </p:txBody>
@@ -6185,6 +7554,690 @@
 </file>
 
 <file path=ppt/slides/slide13.xml><?xml version="1.0" encoding="utf-8"?>
+<p:sld xmlns:a="http://schemas.openxmlformats.org/drawingml/2006/main" xmlns:r="http://schemas.openxmlformats.org/officeDocument/2006/relationships" xmlns:p="http://schemas.openxmlformats.org/presentationml/2006/main">
+  <p:cSld>
+    <p:bg>
+      <p:bgPr>
+        <a:solidFill>
+          <a:srgbClr val="120052"/>
+        </a:solidFill>
+        <a:effectLst/>
+      </p:bgPr>
+    </p:bg>
+    <p:spTree>
+      <p:nvGrpSpPr>
+        <p:cNvPr id="1" name="">
+          <a:extLst>
+            <a:ext uri="{FF2B5EF4-FFF2-40B4-BE49-F238E27FC236}">
+              <a16:creationId xmlns:a16="http://schemas.microsoft.com/office/drawing/2014/main" id="{DCFA54C5-9C20-32AE-5DD6-3CC31F9783BB}"/>
+            </a:ext>
+          </a:extLst>
+        </p:cNvPr>
+        <p:cNvGrpSpPr/>
+        <p:nvPr/>
+      </p:nvGrpSpPr>
+      <p:grpSpPr>
+        <a:xfrm>
+          <a:off x="0" y="0"/>
+          <a:ext cx="0" cy="0"/>
+          <a:chOff x="0" y="0"/>
+          <a:chExt cx="0" cy="0"/>
+        </a:xfrm>
+      </p:grpSpPr>
+      <p:grpSp>
+        <p:nvGrpSpPr>
+          <p:cNvPr id="2" name="Group 2">
+            <a:extLst>
+              <a:ext uri="{FF2B5EF4-FFF2-40B4-BE49-F238E27FC236}">
+                <a16:creationId xmlns:a16="http://schemas.microsoft.com/office/drawing/2014/main" id="{9C4732CD-6AC2-4F82-05CE-77FEB0904581}"/>
+              </a:ext>
+            </a:extLst>
+          </p:cNvPr>
+          <p:cNvGrpSpPr/>
+          <p:nvPr/>
+        </p:nvGrpSpPr>
+        <p:grpSpPr>
+          <a:xfrm>
+            <a:off x="14744700" y="7829550"/>
+            <a:ext cx="4846643" cy="1791955"/>
+            <a:chOff x="0" y="0"/>
+            <a:chExt cx="6462190" cy="2389273"/>
+          </a:xfrm>
+        </p:grpSpPr>
+        <p:sp>
+          <p:nvSpPr>
+            <p:cNvPr id="3" name="Freeform 3">
+              <a:extLst>
+                <a:ext uri="{FF2B5EF4-FFF2-40B4-BE49-F238E27FC236}">
+                  <a16:creationId xmlns:a16="http://schemas.microsoft.com/office/drawing/2014/main" id="{5B7A34F7-6152-DD6B-ADB9-2190F2149F68}"/>
+                </a:ext>
+              </a:extLst>
+            </p:cNvPr>
+            <p:cNvSpPr/>
+            <p:nvPr/>
+          </p:nvSpPr>
+          <p:spPr>
+            <a:xfrm>
+              <a:off x="0" y="0"/>
+              <a:ext cx="2389273" cy="2389273"/>
+            </a:xfrm>
+            <a:custGeom>
+              <a:avLst/>
+              <a:gdLst/>
+              <a:ahLst/>
+              <a:cxnLst/>
+              <a:rect l="l" t="t" r="r" b="b"/>
+              <a:pathLst>
+                <a:path w="2389273" h="2389273">
+                  <a:moveTo>
+                    <a:pt x="0" y="0"/>
+                  </a:moveTo>
+                  <a:lnTo>
+                    <a:pt x="2389273" y="0"/>
+                  </a:lnTo>
+                  <a:lnTo>
+                    <a:pt x="2389273" y="2389273"/>
+                  </a:lnTo>
+                  <a:lnTo>
+                    <a:pt x="0" y="2389273"/>
+                  </a:lnTo>
+                  <a:lnTo>
+                    <a:pt x="0" y="0"/>
+                  </a:lnTo>
+                  <a:close/>
+                </a:path>
+              </a:pathLst>
+            </a:custGeom>
+            <a:blipFill>
+              <a:blip r:embed="rId2">
+                <a:extLst>
+                  <a:ext uri="{96DAC541-7B7A-43D3-8B79-37D633B846F1}">
+                    <asvg:svgBlip xmlns:asvg="http://schemas.microsoft.com/office/drawing/2016/SVG/main" r:embed="rId3"/>
+                  </a:ext>
+                </a:extLst>
+              </a:blip>
+              <a:stretch>
+                <a:fillRect/>
+              </a:stretch>
+            </a:blipFill>
+          </p:spPr>
+          <p:txBody>
+            <a:bodyPr/>
+            <a:lstStyle/>
+            <a:p>
+              <a:endParaRPr lang="en-US"/>
+            </a:p>
+          </p:txBody>
+        </p:sp>
+        <p:sp>
+          <p:nvSpPr>
+            <p:cNvPr id="4" name="Freeform 4">
+              <a:extLst>
+                <a:ext uri="{FF2B5EF4-FFF2-40B4-BE49-F238E27FC236}">
+                  <a16:creationId xmlns:a16="http://schemas.microsoft.com/office/drawing/2014/main" id="{FF4E755B-FFE0-E3DE-E84C-C6C592D65FDF}"/>
+                </a:ext>
+              </a:extLst>
+            </p:cNvPr>
+            <p:cNvSpPr/>
+            <p:nvPr/>
+          </p:nvSpPr>
+          <p:spPr>
+            <a:xfrm>
+              <a:off x="2036459" y="0"/>
+              <a:ext cx="2389273" cy="2389273"/>
+            </a:xfrm>
+            <a:custGeom>
+              <a:avLst/>
+              <a:gdLst/>
+              <a:ahLst/>
+              <a:cxnLst/>
+              <a:rect l="l" t="t" r="r" b="b"/>
+              <a:pathLst>
+                <a:path w="2389273" h="2389273">
+                  <a:moveTo>
+                    <a:pt x="0" y="0"/>
+                  </a:moveTo>
+                  <a:lnTo>
+                    <a:pt x="2389273" y="0"/>
+                  </a:lnTo>
+                  <a:lnTo>
+                    <a:pt x="2389273" y="2389273"/>
+                  </a:lnTo>
+                  <a:lnTo>
+                    <a:pt x="0" y="2389273"/>
+                  </a:lnTo>
+                  <a:lnTo>
+                    <a:pt x="0" y="0"/>
+                  </a:lnTo>
+                  <a:close/>
+                </a:path>
+              </a:pathLst>
+            </a:custGeom>
+            <a:blipFill>
+              <a:blip r:embed="rId2">
+                <a:extLst>
+                  <a:ext uri="{96DAC541-7B7A-43D3-8B79-37D633B846F1}">
+                    <asvg:svgBlip xmlns:asvg="http://schemas.microsoft.com/office/drawing/2016/SVG/main" r:embed="rId3"/>
+                  </a:ext>
+                </a:extLst>
+              </a:blip>
+              <a:stretch>
+                <a:fillRect/>
+              </a:stretch>
+            </a:blipFill>
+          </p:spPr>
+          <p:txBody>
+            <a:bodyPr/>
+            <a:lstStyle/>
+            <a:p>
+              <a:endParaRPr lang="en-US"/>
+            </a:p>
+          </p:txBody>
+        </p:sp>
+        <p:sp>
+          <p:nvSpPr>
+            <p:cNvPr id="5" name="Freeform 5">
+              <a:extLst>
+                <a:ext uri="{FF2B5EF4-FFF2-40B4-BE49-F238E27FC236}">
+                  <a16:creationId xmlns:a16="http://schemas.microsoft.com/office/drawing/2014/main" id="{14511A4E-67B2-E57B-E370-627C355F1AD1}"/>
+                </a:ext>
+              </a:extLst>
+            </p:cNvPr>
+            <p:cNvSpPr/>
+            <p:nvPr/>
+          </p:nvSpPr>
+          <p:spPr>
+            <a:xfrm>
+              <a:off x="4072917" y="0"/>
+              <a:ext cx="2389273" cy="2389273"/>
+            </a:xfrm>
+            <a:custGeom>
+              <a:avLst/>
+              <a:gdLst/>
+              <a:ahLst/>
+              <a:cxnLst/>
+              <a:rect l="l" t="t" r="r" b="b"/>
+              <a:pathLst>
+                <a:path w="2389273" h="2389273">
+                  <a:moveTo>
+                    <a:pt x="0" y="0"/>
+                  </a:moveTo>
+                  <a:lnTo>
+                    <a:pt x="2389273" y="0"/>
+                  </a:lnTo>
+                  <a:lnTo>
+                    <a:pt x="2389273" y="2389273"/>
+                  </a:lnTo>
+                  <a:lnTo>
+                    <a:pt x="0" y="2389273"/>
+                  </a:lnTo>
+                  <a:lnTo>
+                    <a:pt x="0" y="0"/>
+                  </a:lnTo>
+                  <a:close/>
+                </a:path>
+              </a:pathLst>
+            </a:custGeom>
+            <a:blipFill>
+              <a:blip r:embed="rId2">
+                <a:extLst>
+                  <a:ext uri="{96DAC541-7B7A-43D3-8B79-37D633B846F1}">
+                    <asvg:svgBlip xmlns:asvg="http://schemas.microsoft.com/office/drawing/2016/SVG/main" r:embed="rId3"/>
+                  </a:ext>
+                </a:extLst>
+              </a:blip>
+              <a:stretch>
+                <a:fillRect/>
+              </a:stretch>
+            </a:blipFill>
+          </p:spPr>
+          <p:txBody>
+            <a:bodyPr/>
+            <a:lstStyle/>
+            <a:p>
+              <a:endParaRPr lang="en-US"/>
+            </a:p>
+          </p:txBody>
+        </p:sp>
+      </p:grpSp>
+      <p:grpSp>
+        <p:nvGrpSpPr>
+          <p:cNvPr id="6" name="Group 6">
+            <a:extLst>
+              <a:ext uri="{FF2B5EF4-FFF2-40B4-BE49-F238E27FC236}">
+                <a16:creationId xmlns:a16="http://schemas.microsoft.com/office/drawing/2014/main" id="{33C6515A-F91A-7BCD-57B5-DEA6C41A6BFF}"/>
+              </a:ext>
+            </a:extLst>
+          </p:cNvPr>
+          <p:cNvGrpSpPr/>
+          <p:nvPr/>
+        </p:nvGrpSpPr>
+        <p:grpSpPr>
+          <a:xfrm>
+            <a:off x="0" y="2125967"/>
+            <a:ext cx="18288000" cy="8161033"/>
+            <a:chOff x="0" y="0"/>
+            <a:chExt cx="4816593" cy="2149408"/>
+          </a:xfrm>
+        </p:grpSpPr>
+        <p:sp>
+          <p:nvSpPr>
+            <p:cNvPr id="7" name="Freeform 7">
+              <a:extLst>
+                <a:ext uri="{FF2B5EF4-FFF2-40B4-BE49-F238E27FC236}">
+                  <a16:creationId xmlns:a16="http://schemas.microsoft.com/office/drawing/2014/main" id="{BE346163-5076-E6CA-E266-DB44F34047E3}"/>
+                </a:ext>
+              </a:extLst>
+            </p:cNvPr>
+            <p:cNvSpPr/>
+            <p:nvPr/>
+          </p:nvSpPr>
+          <p:spPr>
+            <a:xfrm>
+              <a:off x="0" y="0"/>
+              <a:ext cx="4816592" cy="2149408"/>
+            </a:xfrm>
+            <a:custGeom>
+              <a:avLst/>
+              <a:gdLst/>
+              <a:ahLst/>
+              <a:cxnLst/>
+              <a:rect l="l" t="t" r="r" b="b"/>
+              <a:pathLst>
+                <a:path w="4816592" h="2149408">
+                  <a:moveTo>
+                    <a:pt x="0" y="0"/>
+                  </a:moveTo>
+                  <a:lnTo>
+                    <a:pt x="4816592" y="0"/>
+                  </a:lnTo>
+                  <a:lnTo>
+                    <a:pt x="4816592" y="2149408"/>
+                  </a:lnTo>
+                  <a:lnTo>
+                    <a:pt x="0" y="2149408"/>
+                  </a:lnTo>
+                  <a:close/>
+                </a:path>
+              </a:pathLst>
+            </a:custGeom>
+            <a:solidFill>
+              <a:srgbClr val="F4F6FC"/>
+            </a:solidFill>
+          </p:spPr>
+          <p:txBody>
+            <a:bodyPr/>
+            <a:lstStyle/>
+            <a:p>
+              <a:endParaRPr lang="en-US"/>
+            </a:p>
+          </p:txBody>
+        </p:sp>
+        <p:sp>
+          <p:nvSpPr>
+            <p:cNvPr id="8" name="TextBox 8">
+              <a:extLst>
+                <a:ext uri="{FF2B5EF4-FFF2-40B4-BE49-F238E27FC236}">
+                  <a16:creationId xmlns:a16="http://schemas.microsoft.com/office/drawing/2014/main" id="{E8715C04-1427-0E04-328F-20B5B457A800}"/>
+                </a:ext>
+              </a:extLst>
+            </p:cNvPr>
+            <p:cNvSpPr txBox="1"/>
+            <p:nvPr/>
+          </p:nvSpPr>
+          <p:spPr>
+            <a:xfrm>
+              <a:off x="0" y="-104775"/>
+              <a:ext cx="4816593" cy="2254183"/>
+            </a:xfrm>
+            <a:prstGeom prst="rect">
+              <a:avLst/>
+            </a:prstGeom>
+          </p:spPr>
+          <p:txBody>
+            <a:bodyPr lIns="50800" tIns="50800" rIns="50800" bIns="50800" rtlCol="0" anchor="ctr"/>
+            <a:lstStyle/>
+            <a:p>
+              <a:pPr algn="ctr">
+                <a:lnSpc>
+                  <a:spcPts val="3571"/>
+                </a:lnSpc>
+              </a:pPr>
+              <a:endParaRPr/>
+            </a:p>
+          </p:txBody>
+        </p:sp>
+      </p:grpSp>
+      <p:grpSp>
+        <p:nvGrpSpPr>
+          <p:cNvPr id="10" name="Group 10">
+            <a:extLst>
+              <a:ext uri="{FF2B5EF4-FFF2-40B4-BE49-F238E27FC236}">
+                <a16:creationId xmlns:a16="http://schemas.microsoft.com/office/drawing/2014/main" id="{E5543026-6933-4FE6-D51E-727CAACDF9AF}"/>
+              </a:ext>
+            </a:extLst>
+          </p:cNvPr>
+          <p:cNvGrpSpPr/>
+          <p:nvPr/>
+        </p:nvGrpSpPr>
+        <p:grpSpPr>
+          <a:xfrm>
+            <a:off x="666750" y="659606"/>
+            <a:ext cx="11201400" cy="2925577"/>
+            <a:chOff x="0" y="-9525"/>
+            <a:chExt cx="14935200" cy="3900769"/>
+          </a:xfrm>
+        </p:grpSpPr>
+        <p:sp>
+          <p:nvSpPr>
+            <p:cNvPr id="11" name="TextBox 11">
+              <a:extLst>
+                <a:ext uri="{FF2B5EF4-FFF2-40B4-BE49-F238E27FC236}">
+                  <a16:creationId xmlns:a16="http://schemas.microsoft.com/office/drawing/2014/main" id="{42E534A5-D0DD-1F26-4E27-CD1EDC834735}"/>
+                </a:ext>
+              </a:extLst>
+            </p:cNvPr>
+            <p:cNvSpPr txBox="1"/>
+            <p:nvPr/>
+          </p:nvSpPr>
+          <p:spPr>
+            <a:xfrm>
+              <a:off x="0" y="-9525"/>
+              <a:ext cx="14935200" cy="1381575"/>
+            </a:xfrm>
+            <a:prstGeom prst="rect">
+              <a:avLst/>
+            </a:prstGeom>
+          </p:spPr>
+          <p:txBody>
+            <a:bodyPr lIns="0" tIns="0" rIns="0" bIns="0" rtlCol="0" anchor="t">
+              <a:spAutoFit/>
+            </a:bodyPr>
+            <a:lstStyle/>
+            <a:p>
+              <a:pPr marL="0" lvl="0" indent="0" algn="l">
+                <a:lnSpc>
+                  <a:spcPts val="8000"/>
+                </a:lnSpc>
+                <a:spcBef>
+                  <a:spcPct val="0"/>
+                </a:spcBef>
+              </a:pPr>
+              <a:r>
+                <a:rPr lang="es-PA" sz="8000" b="1" spc="-240" dirty="0">
+                  <a:solidFill>
+                    <a:srgbClr val="F4F6FC"/>
+                  </a:solidFill>
+                  <a:latin typeface="ITC Avant Garde Gothic Bold"/>
+                  <a:ea typeface="ITC Avant Garde Gothic Bold"/>
+                  <a:cs typeface="ITC Avant Garde Gothic Bold"/>
+                  <a:sym typeface="ITC Avant Garde Gothic Bold"/>
+                </a:rPr>
+                <a:t>E</a:t>
+              </a:r>
+              <a:r>
+                <a:rPr lang="en-US" sz="8000" b="1" spc="-240" dirty="0" err="1">
+                  <a:solidFill>
+                    <a:srgbClr val="F4F6FC"/>
+                  </a:solidFill>
+                  <a:latin typeface="ITC Avant Garde Gothic Bold"/>
+                  <a:ea typeface="ITC Avant Garde Gothic Bold"/>
+                  <a:cs typeface="ITC Avant Garde Gothic Bold"/>
+                  <a:sym typeface="ITC Avant Garde Gothic Bold"/>
+                </a:rPr>
+                <a:t>nlace</a:t>
+              </a:r>
+              <a:r>
+                <a:rPr lang="en-US" sz="8000" b="1" spc="-240" dirty="0">
+                  <a:solidFill>
+                    <a:srgbClr val="F4F6FC"/>
+                  </a:solidFill>
+                  <a:latin typeface="ITC Avant Garde Gothic Bold"/>
+                  <a:ea typeface="ITC Avant Garde Gothic Bold"/>
+                  <a:cs typeface="ITC Avant Garde Gothic Bold"/>
+                  <a:sym typeface="ITC Avant Garde Gothic Bold"/>
+                </a:rPr>
+                <a:t> </a:t>
+              </a:r>
+              <a:r>
+                <a:rPr lang="en-US" sz="8000" b="1" spc="-240">
+                  <a:solidFill>
+                    <a:srgbClr val="F4F6FC"/>
+                  </a:solidFill>
+                  <a:latin typeface="ITC Avant Garde Gothic Bold"/>
+                  <a:ea typeface="ITC Avant Garde Gothic Bold"/>
+                  <a:cs typeface="ITC Avant Garde Gothic Bold"/>
+                  <a:sym typeface="ITC Avant Garde Gothic Bold"/>
+                </a:rPr>
+                <a:t>a GitHub</a:t>
+              </a:r>
+              <a:endParaRPr lang="en-US" sz="8000" b="1" spc="-240" dirty="0">
+                <a:solidFill>
+                  <a:srgbClr val="F4F6FC"/>
+                </a:solidFill>
+                <a:latin typeface="ITC Avant Garde Gothic Bold"/>
+                <a:ea typeface="ITC Avant Garde Gothic Bold"/>
+                <a:cs typeface="ITC Avant Garde Gothic Bold"/>
+                <a:sym typeface="ITC Avant Garde Gothic Bold"/>
+              </a:endParaRPr>
+            </a:p>
+          </p:txBody>
+        </p:sp>
+        <p:sp>
+          <p:nvSpPr>
+            <p:cNvPr id="12" name="TextBox 12">
+              <a:extLst>
+                <a:ext uri="{FF2B5EF4-FFF2-40B4-BE49-F238E27FC236}">
+                  <a16:creationId xmlns:a16="http://schemas.microsoft.com/office/drawing/2014/main" id="{20478C1C-AD50-E8B6-5238-B9E90EB38ACA}"/>
+                </a:ext>
+              </a:extLst>
+            </p:cNvPr>
+            <p:cNvSpPr txBox="1"/>
+            <p:nvPr/>
+          </p:nvSpPr>
+          <p:spPr>
+            <a:xfrm>
+              <a:off x="0" y="3428964"/>
+              <a:ext cx="11099800" cy="462280"/>
+            </a:xfrm>
+            <a:prstGeom prst="rect">
+              <a:avLst/>
+            </a:prstGeom>
+          </p:spPr>
+          <p:txBody>
+            <a:bodyPr lIns="0" tIns="0" rIns="0" bIns="0" rtlCol="0" anchor="t">
+              <a:spAutoFit/>
+            </a:bodyPr>
+            <a:lstStyle/>
+            <a:p>
+              <a:pPr marL="0" lvl="0" indent="0" algn="l">
+                <a:lnSpc>
+                  <a:spcPts val="2940"/>
+                </a:lnSpc>
+              </a:pPr>
+              <a:endParaRPr/>
+            </a:p>
+          </p:txBody>
+        </p:sp>
+        <p:sp>
+          <p:nvSpPr>
+            <p:cNvPr id="13" name="TextBox 13">
+              <a:extLst>
+                <a:ext uri="{FF2B5EF4-FFF2-40B4-BE49-F238E27FC236}">
+                  <a16:creationId xmlns:a16="http://schemas.microsoft.com/office/drawing/2014/main" id="{FC5444C2-8CE4-39D5-0FFC-97360609DDD8}"/>
+                </a:ext>
+              </a:extLst>
+            </p:cNvPr>
+            <p:cNvSpPr txBox="1"/>
+            <p:nvPr/>
+          </p:nvSpPr>
+          <p:spPr>
+            <a:xfrm>
+              <a:off x="0" y="2235200"/>
+              <a:ext cx="13017500" cy="647700"/>
+            </a:xfrm>
+            <a:prstGeom prst="rect">
+              <a:avLst/>
+            </a:prstGeom>
+          </p:spPr>
+          <p:txBody>
+            <a:bodyPr lIns="0" tIns="0" rIns="0" bIns="0" rtlCol="0" anchor="t">
+              <a:spAutoFit/>
+            </a:bodyPr>
+            <a:lstStyle/>
+            <a:p>
+              <a:pPr marL="0" lvl="0" indent="0" algn="l">
+                <a:lnSpc>
+                  <a:spcPts val="3839"/>
+                </a:lnSpc>
+                <a:spcBef>
+                  <a:spcPct val="0"/>
+                </a:spcBef>
+              </a:pPr>
+              <a:endParaRPr/>
+            </a:p>
+          </p:txBody>
+        </p:sp>
+      </p:grpSp>
+      <p:sp>
+        <p:nvSpPr>
+          <p:cNvPr id="15" name="Rectangle 1">
+            <a:extLst>
+              <a:ext uri="{FF2B5EF4-FFF2-40B4-BE49-F238E27FC236}">
+                <a16:creationId xmlns:a16="http://schemas.microsoft.com/office/drawing/2014/main" id="{F5086F75-4515-E9B2-623B-D6A7DC87E214}"/>
+              </a:ext>
+            </a:extLst>
+          </p:cNvPr>
+          <p:cNvSpPr>
+            <a:spLocks noChangeArrowheads="1"/>
+          </p:cNvSpPr>
+          <p:nvPr/>
+        </p:nvSpPr>
+        <p:spPr bwMode="auto">
+          <a:xfrm>
+            <a:off x="0" y="0"/>
+            <a:ext cx="18288000" cy="0"/>
+          </a:xfrm>
+          <a:prstGeom prst="rect">
+            <a:avLst/>
+          </a:prstGeom>
+          <a:noFill/>
+          <a:ln>
+            <a:noFill/>
+          </a:ln>
+          <a:effectLst/>
+          <a:extLst>
+            <a:ext uri="{909E8E84-426E-40DD-AFC4-6F175D3DCCD1}">
+              <a14:hiddenFill xmlns:a14="http://schemas.microsoft.com/office/drawing/2010/main">
+                <a:solidFill>
+                  <a:schemeClr val="accent1"/>
+                </a:solidFill>
+              </a14:hiddenFill>
+            </a:ext>
+            <a:ext uri="{91240B29-F687-4F45-9708-019B960494DF}">
+              <a14:hiddenLine xmlns:a14="http://schemas.microsoft.com/office/drawing/2010/main" w="9525">
+                <a:solidFill>
+                  <a:schemeClr val="tx1"/>
+                </a:solidFill>
+                <a:miter lim="800000"/>
+                <a:headEnd/>
+                <a:tailEnd/>
+              </a14:hiddenLine>
+            </a:ext>
+            <a:ext uri="{AF507438-7753-43E0-B8FC-AC1667EBCBE1}">
+              <a14:hiddenEffects xmlns:a14="http://schemas.microsoft.com/office/drawing/2010/main">
+                <a:effectLst>
+                  <a:outerShdw dist="35921" dir="2700000" algn="ctr" rotWithShape="0">
+                    <a:schemeClr val="bg2"/>
+                  </a:outerShdw>
+                </a:effectLst>
+              </a14:hiddenEffects>
+            </a:ext>
+          </a:extLst>
+        </p:spPr>
+        <p:txBody>
+          <a:bodyPr vert="horz" wrap="none" lIns="91440" tIns="45720" rIns="91440" bIns="45720" numCol="1" anchor="ctr" anchorCtr="0" compatLnSpc="1">
+            <a:prstTxWarp prst="textNoShape">
+              <a:avLst/>
+            </a:prstTxWarp>
+            <a:spAutoFit/>
+          </a:bodyPr>
+          <a:lstStyle/>
+          <a:p>
+            <a:endParaRPr lang="en-US"/>
+          </a:p>
+        </p:txBody>
+      </p:sp>
+      <p:sp>
+        <p:nvSpPr>
+          <p:cNvPr id="16" name="CuadroTexto 15">
+            <a:extLst>
+              <a:ext uri="{FF2B5EF4-FFF2-40B4-BE49-F238E27FC236}">
+                <a16:creationId xmlns:a16="http://schemas.microsoft.com/office/drawing/2014/main" id="{FA8E9DDC-A425-5E59-74F2-AF4F73241E72}"/>
+              </a:ext>
+            </a:extLst>
+          </p:cNvPr>
+          <p:cNvSpPr txBox="1"/>
+          <p:nvPr/>
+        </p:nvSpPr>
+        <p:spPr>
+          <a:xfrm>
+            <a:off x="1028700" y="4945745"/>
+            <a:ext cx="15925800" cy="2123658"/>
+          </a:xfrm>
+          <a:prstGeom prst="rect">
+            <a:avLst/>
+          </a:prstGeom>
+          <a:noFill/>
+        </p:spPr>
+        <p:txBody>
+          <a:bodyPr wrap="square">
+            <a:spAutoFit/>
+          </a:bodyPr>
+          <a:lstStyle/>
+          <a:p>
+            <a:r>
+              <a:rPr lang="en-US" sz="6600" spc="-76" dirty="0">
+                <a:solidFill>
+                  <a:srgbClr val="000000"/>
+                </a:solidFill>
+                <a:latin typeface="ITC Avant Garde Gothic"/>
+                <a:hlinkClick r:id="rId4">
+                  <a:extLst>
+                    <a:ext uri="{A12FA001-AC4F-418D-AE19-62706E023703}">
+                      <ahyp:hlinkClr xmlns:ahyp="http://schemas.microsoft.com/office/drawing/2018/hyperlinkcolor" val="tx"/>
+                    </a:ext>
+                  </a:extLst>
+                </a:hlinkClick>
+              </a:rPr>
+              <a:t>https://github.com/16marleni/ds4/tree/proyectos/Proyecto1</a:t>
+            </a:r>
+            <a:endParaRPr lang="en-US" sz="6600" spc="-76" dirty="0">
+              <a:solidFill>
+                <a:srgbClr val="000000"/>
+              </a:solidFill>
+              <a:latin typeface="ITC Avant Garde Gothic"/>
+            </a:endParaRPr>
+          </a:p>
+        </p:txBody>
+      </p:sp>
+    </p:spTree>
+    <p:extLst>
+      <p:ext uri="{BB962C8B-B14F-4D97-AF65-F5344CB8AC3E}">
+        <p14:creationId xmlns:p14="http://schemas.microsoft.com/office/powerpoint/2010/main" val="2036031558"/>
+      </p:ext>
+    </p:extLst>
+  </p:cSld>
+  <p:clrMapOvr>
+    <a:masterClrMapping/>
+  </p:clrMapOvr>
+  <p:transition spd="slow">
+    <p:push dir="u"/>
+  </p:transition>
+</p:sld>
+</file>
+
+<file path=ppt/slides/slide14.xml><?xml version="1.0" encoding="utf-8"?>
 <p:sld xmlns:a="http://schemas.openxmlformats.org/drawingml/2006/main" xmlns:r="http://schemas.openxmlformats.org/officeDocument/2006/relationships" xmlns:p="http://schemas.openxmlformats.org/presentationml/2006/main">
   <p:cSld>
     <p:bg>
